--- a/curriculum/M03/W03/L02/slides.pptx
+++ b/curriculum/M03/W03/L02/slides.pptx
@@ -10059,7 +10059,36 @@
                 <a:ea typeface="Malgun Gothic"/>
                 <a:cs typeface="Malgun Gothic"/>
               </a:rPr>
-              <a:t>(효소 결합 상태) + PPi. 방출된 PPi는 가수분해되어 반응을 비가역으로 만든다. 2. </a:t>
+              <a:t>(효소 결합 상태) + PPi. 방출된 PPi는 가수분해되어 반응을 비가역으로 만든다.</a:t>
+            </a:r>
+          </a:p>
+          <a:p>
+            <a:pPr>
+              <a:spcAft>
+                <a:spcPts val="900"/>
+              </a:spcAft>
+            </a:pPr>
+            <a:r>
+              <a:rPr sz="1800" b="1" i="0">
+                <a:solidFill>
+                  <a:srgbClr val="F2B705"/>
+                </a:solidFill>
+                <a:latin typeface="Malgun Gothic"/>
+                <a:ea typeface="Malgun Gothic"/>
+                <a:cs typeface="Malgun Gothic"/>
+              </a:rPr>
+              <a:t>•  </a:t>
+            </a:r>
+            <a:r>
+              <a:rPr sz="1800" b="0" i="0">
+                <a:solidFill>
+                  <a:srgbClr val="11202B"/>
+                </a:solidFill>
+                <a:latin typeface="Malgun Gothic"/>
+                <a:ea typeface="Malgun Gothic"/>
+                <a:cs typeface="Malgun Gothic"/>
+              </a:rPr>
+              <a:t>2. </a:t>
             </a:r>
             <a:r>
               <a:rPr sz="1800" b="1" i="0">
